--- a/exports/OmniCognition_Pitch_Presentation.pptx
+++ b/exports/OmniCognition_Pitch_Presentation.pptx
@@ -5019,7 +5019,7 @@
             <a:br/>
             <a:br/>
             <a:r>
-              <a:t>Repository: https://github.com/R0hanG0yal/Snapdragon-OmniCognition</a:t>
+              <a:t>Repository: https://github.com/R0hanG0yal/snapdragon_hack</a:t>
             </a:r>
             <a:br/>
             <a:r>
